--- a/dist/초5/수학/도형과측정/초5_수학_도형과측정_01_규칙과대응_학생용.pptx
+++ b/dist/초5/수학/도형과측정/초5_수학_도형과측정_01_규칙과대응_학생용.pptx
@@ -119,13 +119,13 @@
   <p:extLst>
     <p:ext uri="{521415D9-36F7-43E2-AB2F-B90AF26B5E84}">
       <p14:sectionLst xmlns:p14="http://schemas.microsoft.com/office/powerpoint/2010/main">
-        <p14:section name="도입" id="{f8ace9ce-dc43-5fa4-6fdf-eee4a9e51e8a}">
+        <p14:section name="도입" id="{178cb9e3-18b6-bdc8-606b-6e13751a5f08}">
           <p14:sldIdLst>
             <p14:sldId id="256"/>
             <p14:sldId id="257"/>
           </p14:sldIdLst>
         </p14:section>
-        <p14:section name="개념" id="{dfbbe6bc-1391-3f66-0547-5b9d1c9dd518}">
+        <p14:section name="개념" id="{86ea75c2-798e-edb0-b0f1-b678f00aa2c5}">
           <p14:sldIdLst>
             <p14:sldId id="258"/>
             <p14:sldId id="259"/>
@@ -133,31 +133,31 @@
             <p14:sldId id="262"/>
           </p14:sldIdLst>
         </p14:section>
-        <p14:section name="연습" id="{35101ae8-8f91-c13f-590c-72bc8ab5d53b}">
+        <p14:section name="연습" id="{547787b5-218b-dc51-82fc-6581737dd431}">
           <p14:sldIdLst>
             <p14:sldId id="261"/>
             <p14:sldId id="263"/>
             <p14:sldId id="264"/>
           </p14:sldIdLst>
         </p14:section>
-        <p14:section name="개념" id="{2514a549-3e97-4d9b-ecf8-44e8097327d0}">
+        <p14:section name="개념" id="{74b7f875-9071-829f-a6af-6ee38e84300f}">
           <p14:sldIdLst/>
         </p14:section>
-        <p14:section name="연습" id="{c79718d1-1922-7703-0021-5901bed76a51}">
+        <p14:section name="연습" id="{270f16db-4ce0-4954-9834-0f9167f9968b}">
           <p14:sldIdLst/>
         </p14:section>
-        <p14:section name="확인" id="{b6c96acc-b9eb-bb6d-f468-4f7b94c11682}">
+        <p14:section name="확인" id="{b1e1ba26-384d-8ac2-ba5b-f34aed17d462}">
           <p14:sldIdLst>
             <p14:sldId id="265"/>
             <p14:sldId id="266"/>
           </p14:sldIdLst>
         </p14:section>
-        <p14:section name="정리" id="{e78a9af7-fec0-41ac-320b-46a218f24436}">
+        <p14:section name="정리" id="{64c7445c-8703-231e-f92e-44e68b9e0ee5}">
           <p14:sldIdLst>
             <p14:sldId id="267"/>
           </p14:sldIdLst>
         </p14:section>
-        <p14:section name="보충" id="{2c9b2329-7f2e-1838-5b47-9f92e207b588}">
+        <p14:section name="보충" id="{249fbc50-07d7-be75-a241-aa5947920335}">
           <p14:sldIdLst>
             <p14:sldId id="268"/>
           </p14:sldIdLst>
